--- a/10-Knowledge-Products/KP1-GEA/videos/module_6/en/decks/KP1_M6_6.3_Deck_v0.1.pptx
+++ b/10-Knowledge-Products/KP1-GEA/videos/module_6/en/decks/KP1_M6_6.3_Deck_v0.1.pptx
@@ -1079,7 +1079,7 @@
           <a:lstStyle/>
           <a:p>
             <a:r>
-              <a:t>VO: Start with what stays the same, because it is most of it. The five phases — discover, assess, adapt, plan, execute and govern. The four sign-offs. The deliverables. The reuse-before-build default. The binding governance board. None of that is specific to education. It is the method. What changes when you move to another sector is only the contents: the institutions you map, and the kind of record at the centre of the fragmentation.</a:t>
+              <a:t>VO: Start with what stays the same, because it is most of it. The five phases — discover, assess, adapt, plan, execute and govern. The four sign-offs. The six deliverables. The reuse-before-build default. The binding governance board. None of that is specific to education. It is the method. What changes when you move to another sector is only the contents: the institutions you map, and the kind of record at the centre of the fragmentation.</a:t>
             </a:r>
           </a:p>
         </p:txBody>
@@ -1301,7 +1301,7 @@
           <a:p/>
           <a:p>
             <a:r>
-              <a:t>Production cue: the pivotal slide of this video. Hold it a beat longer.</a:t>
+              <a:t>Production cue: the pivotal slide of this video. Hold it a beat longer. On screen: bar length is the argument and carries no figures — the dark segments are the muscle built once; every later sector's bar is only its own architecture plus a sliver for consuming what exists.</a:t>
             </a:r>
           </a:p>
         </p:txBody>
@@ -12644,7 +12644,7 @@
                 </a:solidFill>
                 <a:latin typeface="Arial"/>
               </a:rPr>
-              <a:t>The five phases, the four sign-offs, the deliverables, the reuse-before-build default, the binding governance board — none of it is specific to education. It is the method.</a:t>
+              <a:t>The five phases, the four sign-offs, the six deliverables, the reuse-before-build default, the binding governance board — none of it is specific to education. It is the method.</a:t>
             </a:r>
           </a:p>
           <a:p>
@@ -13404,8 +13404,8 @@
         </p:nvSpPr>
         <p:spPr>
           <a:xfrm>
-            <a:off x="658368" y="1600200"/>
-            <a:ext cx="10881360" cy="2651760"/>
+            <a:off x="658368" y="1508760"/>
+            <a:ext cx="10881360" cy="329184"/>
           </a:xfrm>
           <a:prstGeom prst="rect">
             <a:avLst/>
@@ -13418,60 +13418,73 @@
           </a:bodyPr>
           <a:lstStyle/>
           <a:p>
-            <a:pPr>
-              <a:spcAft>
-                <a:spcPts val="1200"/>
-              </a:spcAft>
-            </a:pPr>
-            <a:r>
-              <a:rPr sz="2000" b="0" i="0">
+            <a:r>
+              <a:rPr sz="1200" b="1" i="0">
+                <a:solidFill>
+                  <a:srgbClr val="595959"/>
+                </a:solidFill>
+                <a:latin typeface="Arial"/>
+              </a:rPr>
+              <a:t>WHAT EACH SECTOR PAYS FOR — directional, not a costing</a:t>
+            </a:r>
+          </a:p>
+        </p:txBody>
+      </p:sp>
+      <p:sp>
+        <p:nvSpPr>
+          <p:cNvPr id="5" name="TextBox 4"/>
+          <p:cNvSpPr txBox="1"/>
+          <p:nvPr/>
+        </p:nvSpPr>
+        <p:spPr>
+          <a:xfrm>
+            <a:off x="658368" y="1892807"/>
+            <a:ext cx="2514600" cy="548640"/>
+          </a:xfrm>
+          <a:prstGeom prst="rect">
+            <a:avLst/>
+          </a:prstGeom>
+          <a:noFill/>
+        </p:spPr>
+        <p:txBody>
+          <a:bodyPr wrap="square" anchor="ctr">
+            <a:spAutoFit/>
+          </a:bodyPr>
+          <a:lstStyle/>
+          <a:p>
+            <a:r>
+              <a:rPr sz="1400" b="1" i="0">
                 <a:solidFill>
                   <a:srgbClr val="1A1A1A"/>
                 </a:solidFill>
                 <a:latin typeface="Arial"/>
               </a:rPr>
-              <a:t>The expensive part is the first time — the permanent team, the localised framework, the governance, and above all the shared platforms like identity and data exchange.</a:t>
-            </a:r>
-          </a:p>
-          <a:p>
-            <a:pPr>
-              <a:spcAft>
-                <a:spcPts val="1200"/>
-              </a:spcAft>
-            </a:pPr>
-            <a:r>
-              <a:rPr sz="2000" b="0" i="0">
-                <a:solidFill>
-                  <a:srgbClr val="1A1A1A"/>
-                </a:solidFill>
-                <a:latin typeface="Arial"/>
-              </a:rPr>
-              <a:t>Once those exist, the second sector does not rebuild them; it consumes them. Health reuses the identity platform the education work stood up. Agriculture reuses the data-exchange backbone.</a:t>
-            </a:r>
-          </a:p>
-        </p:txBody>
-      </p:sp>
-      <p:sp>
-        <p:nvSpPr>
-          <p:cNvPr id="5" name="Rounded Rectangle 4"/>
+              <a:t>Sector 1 — education</a:t>
+            </a:r>
+          </a:p>
+        </p:txBody>
+      </p:sp>
+      <p:sp>
+        <p:nvSpPr>
+          <p:cNvPr id="6" name="Rectangle 5"/>
           <p:cNvSpPr/>
           <p:nvPr/>
         </p:nvSpPr>
         <p:spPr>
           <a:xfrm>
-            <a:off x="658368" y="4434840"/>
-            <a:ext cx="10881360" cy="1325880"/>
-          </a:xfrm>
-          <a:prstGeom prst="roundRect">
-            <a:avLst>
-              <a:gd name="adj" fmla="val 4500"/>
-            </a:avLst>
+            <a:off x="3310128" y="1947672"/>
+            <a:ext cx="1289304" cy="438912"/>
+          </a:xfrm>
+          <a:prstGeom prst="rect">
+            <a:avLst/>
           </a:prstGeom>
           <a:solidFill>
-            <a:srgbClr val="E5F5FB"/>
+            <a:srgbClr val="006E96"/>
           </a:solidFill>
-          <a:ln>
-            <a:noFill/>
+          <a:ln w="9525">
+            <a:solidFill>
+              <a:srgbClr val="FFFFFF"/>
+            </a:solidFill>
           </a:ln>
           <a:effectLst/>
         </p:spPr>
@@ -13490,23 +13503,252 @@
           </a:fontRef>
         </p:style>
         <p:txBody>
-          <a:bodyPr rtlCol="0" anchor="ctr"/>
+          <a:bodyPr rtlCol="0" anchor="ctr" lIns="54864" rIns="54864" tIns="0" bIns="0" wrap="square"/>
           <a:lstStyle/>
           <a:p>
             <a:pPr algn="ctr"/>
-          </a:p>
-        </p:txBody>
-      </p:sp>
-      <p:sp>
-        <p:nvSpPr>
-          <p:cNvPr id="6" name="TextBox 5"/>
+            <a:r>
+              <a:rPr sz="1100" b="1" i="0">
+                <a:solidFill>
+                  <a:srgbClr val="FFFFFF"/>
+                </a:solidFill>
+                <a:latin typeface="Arial"/>
+              </a:rPr>
+              <a:t>permanent team</a:t>
+            </a:r>
+          </a:p>
+        </p:txBody>
+      </p:sp>
+      <p:sp>
+        <p:nvSpPr>
+          <p:cNvPr id="7" name="Rectangle 6"/>
+          <p:cNvSpPr/>
+          <p:nvPr/>
+        </p:nvSpPr>
+        <p:spPr>
+          <a:xfrm>
+            <a:off x="4626864" y="1947672"/>
+            <a:ext cx="1042415" cy="438912"/>
+          </a:xfrm>
+          <a:prstGeom prst="rect">
+            <a:avLst/>
+          </a:prstGeom>
+          <a:solidFill>
+            <a:srgbClr val="006E96"/>
+          </a:solidFill>
+          <a:ln w="9525">
+            <a:solidFill>
+              <a:srgbClr val="FFFFFF"/>
+            </a:solidFill>
+          </a:ln>
+          <a:effectLst/>
+        </p:spPr>
+        <p:style>
+          <a:lnRef idx="1">
+            <a:schemeClr val="accent1"/>
+          </a:lnRef>
+          <a:fillRef idx="3">
+            <a:schemeClr val="accent1"/>
+          </a:fillRef>
+          <a:effectRef idx="2">
+            <a:schemeClr val="accent1"/>
+          </a:effectRef>
+          <a:fontRef idx="minor">
+            <a:schemeClr val="lt1"/>
+          </a:fontRef>
+        </p:style>
+        <p:txBody>
+          <a:bodyPr rtlCol="0" anchor="ctr" lIns="54864" rIns="54864" tIns="0" bIns="0" wrap="square"/>
+          <a:lstStyle/>
+          <a:p>
+            <a:pPr algn="ctr"/>
+            <a:r>
+              <a:rPr sz="1100" b="1" i="0">
+                <a:solidFill>
+                  <a:srgbClr val="FFFFFF"/>
+                </a:solidFill>
+                <a:latin typeface="Arial"/>
+              </a:rPr>
+              <a:t>framework</a:t>
+            </a:r>
+          </a:p>
+        </p:txBody>
+      </p:sp>
+      <p:sp>
+        <p:nvSpPr>
+          <p:cNvPr id="8" name="Rectangle 7"/>
+          <p:cNvSpPr/>
+          <p:nvPr/>
+        </p:nvSpPr>
+        <p:spPr>
+          <a:xfrm>
+            <a:off x="5696712" y="1947672"/>
+            <a:ext cx="1042415" cy="438912"/>
+          </a:xfrm>
+          <a:prstGeom prst="rect">
+            <a:avLst/>
+          </a:prstGeom>
+          <a:solidFill>
+            <a:srgbClr val="006E96"/>
+          </a:solidFill>
+          <a:ln w="9525">
+            <a:solidFill>
+              <a:srgbClr val="FFFFFF"/>
+            </a:solidFill>
+          </a:ln>
+          <a:effectLst/>
+        </p:spPr>
+        <p:style>
+          <a:lnRef idx="1">
+            <a:schemeClr val="accent1"/>
+          </a:lnRef>
+          <a:fillRef idx="3">
+            <a:schemeClr val="accent1"/>
+          </a:fillRef>
+          <a:effectRef idx="2">
+            <a:schemeClr val="accent1"/>
+          </a:effectRef>
+          <a:fontRef idx="minor">
+            <a:schemeClr val="lt1"/>
+          </a:fontRef>
+        </p:style>
+        <p:txBody>
+          <a:bodyPr rtlCol="0" anchor="ctr" lIns="54864" rIns="54864" tIns="0" bIns="0" wrap="square"/>
+          <a:lstStyle/>
+          <a:p>
+            <a:pPr algn="ctr"/>
+            <a:r>
+              <a:rPr sz="1100" b="1" i="0">
+                <a:solidFill>
+                  <a:srgbClr val="FFFFFF"/>
+                </a:solidFill>
+                <a:latin typeface="Arial"/>
+              </a:rPr>
+              <a:t>governance</a:t>
+            </a:r>
+          </a:p>
+        </p:txBody>
+      </p:sp>
+      <p:sp>
+        <p:nvSpPr>
+          <p:cNvPr id="9" name="Rectangle 8"/>
+          <p:cNvSpPr/>
+          <p:nvPr/>
+        </p:nvSpPr>
+        <p:spPr>
+          <a:xfrm>
+            <a:off x="6766560" y="1947672"/>
+            <a:ext cx="1947672" cy="438912"/>
+          </a:xfrm>
+          <a:prstGeom prst="rect">
+            <a:avLst/>
+          </a:prstGeom>
+          <a:solidFill>
+            <a:srgbClr val="006E96"/>
+          </a:solidFill>
+          <a:ln w="9525">
+            <a:solidFill>
+              <a:srgbClr val="FFFFFF"/>
+            </a:solidFill>
+          </a:ln>
+          <a:effectLst/>
+        </p:spPr>
+        <p:style>
+          <a:lnRef idx="1">
+            <a:schemeClr val="accent1"/>
+          </a:lnRef>
+          <a:fillRef idx="3">
+            <a:schemeClr val="accent1"/>
+          </a:fillRef>
+          <a:effectRef idx="2">
+            <a:schemeClr val="accent1"/>
+          </a:effectRef>
+          <a:fontRef idx="minor">
+            <a:schemeClr val="lt1"/>
+          </a:fontRef>
+        </p:style>
+        <p:txBody>
+          <a:bodyPr rtlCol="0" anchor="ctr" lIns="54864" rIns="54864" tIns="0" bIns="0" wrap="square"/>
+          <a:lstStyle/>
+          <a:p>
+            <a:pPr algn="ctr"/>
+            <a:r>
+              <a:rPr sz="1100" b="1" i="0">
+                <a:solidFill>
+                  <a:srgbClr val="FFFFFF"/>
+                </a:solidFill>
+                <a:latin typeface="Arial"/>
+              </a:rPr>
+              <a:t>identity · data exchange</a:t>
+            </a:r>
+          </a:p>
+        </p:txBody>
+      </p:sp>
+      <p:sp>
+        <p:nvSpPr>
+          <p:cNvPr id="10" name="Rectangle 9"/>
+          <p:cNvSpPr/>
+          <p:nvPr/>
+        </p:nvSpPr>
+        <p:spPr>
+          <a:xfrm>
+            <a:off x="8741664" y="1947672"/>
+            <a:ext cx="1618488" cy="438912"/>
+          </a:xfrm>
+          <a:prstGeom prst="rect">
+            <a:avLst/>
+          </a:prstGeom>
+          <a:solidFill>
+            <a:srgbClr val="009CD6"/>
+          </a:solidFill>
+          <a:ln w="9525">
+            <a:solidFill>
+              <a:srgbClr val="FFFFFF"/>
+            </a:solidFill>
+          </a:ln>
+          <a:effectLst/>
+        </p:spPr>
+        <p:style>
+          <a:lnRef idx="1">
+            <a:schemeClr val="accent1"/>
+          </a:lnRef>
+          <a:fillRef idx="3">
+            <a:schemeClr val="accent1"/>
+          </a:fillRef>
+          <a:effectRef idx="2">
+            <a:schemeClr val="accent1"/>
+          </a:effectRef>
+          <a:fontRef idx="minor">
+            <a:schemeClr val="lt1"/>
+          </a:fontRef>
+        </p:style>
+        <p:txBody>
+          <a:bodyPr rtlCol="0" anchor="ctr" lIns="54864" rIns="54864" tIns="0" bIns="0" wrap="square"/>
+          <a:lstStyle/>
+          <a:p>
+            <a:pPr algn="ctr"/>
+            <a:r>
+              <a:rPr sz="1100" b="1" i="0">
+                <a:solidFill>
+                  <a:srgbClr val="FFFFFF"/>
+                </a:solidFill>
+                <a:latin typeface="Arial"/>
+              </a:rPr>
+              <a:t>its own architecture</a:t>
+            </a:r>
+          </a:p>
+        </p:txBody>
+      </p:sp>
+      <p:sp>
+        <p:nvSpPr>
+          <p:cNvPr id="11" name="TextBox 10"/>
           <p:cNvSpPr txBox="1"/>
           <p:nvPr/>
         </p:nvSpPr>
         <p:spPr>
           <a:xfrm>
-            <a:off x="859536" y="4626864"/>
-            <a:ext cx="10479024" cy="1051560"/>
+            <a:off x="658368" y="2642615"/>
+            <a:ext cx="2514600" cy="548640"/>
           </a:xfrm>
           <a:prstGeom prst="rect">
             <a:avLst/>
@@ -13514,18 +13756,547 @@
           <a:noFill/>
         </p:spPr>
         <p:txBody>
+          <a:bodyPr wrap="square" anchor="ctr">
+            <a:spAutoFit/>
+          </a:bodyPr>
+          <a:lstStyle/>
+          <a:p>
+            <a:r>
+              <a:rPr sz="1400" b="1" i="0">
+                <a:solidFill>
+                  <a:srgbClr val="1A1A1A"/>
+                </a:solidFill>
+                <a:latin typeface="Arial"/>
+              </a:rPr>
+              <a:t>Sector 2 — health</a:t>
+            </a:r>
+          </a:p>
+        </p:txBody>
+      </p:sp>
+      <p:sp>
+        <p:nvSpPr>
+          <p:cNvPr id="12" name="Rectangle 11"/>
+          <p:cNvSpPr/>
+          <p:nvPr/>
+        </p:nvSpPr>
+        <p:spPr>
+          <a:xfrm>
+            <a:off x="3310128" y="2697479"/>
+            <a:ext cx="1618488" cy="438912"/>
+          </a:xfrm>
+          <a:prstGeom prst="rect">
+            <a:avLst/>
+          </a:prstGeom>
+          <a:solidFill>
+            <a:srgbClr val="009CD6"/>
+          </a:solidFill>
+          <a:ln w="9525">
+            <a:solidFill>
+              <a:srgbClr val="FFFFFF"/>
+            </a:solidFill>
+          </a:ln>
+          <a:effectLst/>
+        </p:spPr>
+        <p:style>
+          <a:lnRef idx="1">
+            <a:schemeClr val="accent1"/>
+          </a:lnRef>
+          <a:fillRef idx="3">
+            <a:schemeClr val="accent1"/>
+          </a:fillRef>
+          <a:effectRef idx="2">
+            <a:schemeClr val="accent1"/>
+          </a:effectRef>
+          <a:fontRef idx="minor">
+            <a:schemeClr val="lt1"/>
+          </a:fontRef>
+        </p:style>
+        <p:txBody>
+          <a:bodyPr rtlCol="0" anchor="ctr" lIns="54864" rIns="54864" tIns="0" bIns="0" wrap="square"/>
+          <a:lstStyle/>
+          <a:p>
+            <a:pPr algn="ctr"/>
+            <a:r>
+              <a:rPr sz="1100" b="1" i="0">
+                <a:solidFill>
+                  <a:srgbClr val="FFFFFF"/>
+                </a:solidFill>
+                <a:latin typeface="Arial"/>
+              </a:rPr>
+              <a:t>its own architecture</a:t>
+            </a:r>
+          </a:p>
+        </p:txBody>
+      </p:sp>
+      <p:sp>
+        <p:nvSpPr>
+          <p:cNvPr id="13" name="Rectangle 12"/>
+          <p:cNvSpPr/>
+          <p:nvPr/>
+        </p:nvSpPr>
+        <p:spPr>
+          <a:xfrm>
+            <a:off x="4956048" y="2697479"/>
+            <a:ext cx="877824" cy="438912"/>
+          </a:xfrm>
+          <a:prstGeom prst="rect">
+            <a:avLst/>
+          </a:prstGeom>
+          <a:solidFill>
+            <a:srgbClr val="E5F5FB"/>
+          </a:solidFill>
+          <a:ln w="9525">
+            <a:solidFill>
+              <a:srgbClr val="FFFFFF"/>
+            </a:solidFill>
+          </a:ln>
+          <a:effectLst/>
+        </p:spPr>
+        <p:style>
+          <a:lnRef idx="1">
+            <a:schemeClr val="accent1"/>
+          </a:lnRef>
+          <a:fillRef idx="3">
+            <a:schemeClr val="accent1"/>
+          </a:fillRef>
+          <a:effectRef idx="2">
+            <a:schemeClr val="accent1"/>
+          </a:effectRef>
+          <a:fontRef idx="minor">
+            <a:schemeClr val="lt1"/>
+          </a:fontRef>
+        </p:style>
+        <p:txBody>
+          <a:bodyPr rtlCol="0" anchor="ctr" lIns="54864" rIns="54864" tIns="0" bIns="0" wrap="square"/>
+          <a:lstStyle/>
+          <a:p>
+            <a:pPr algn="ctr"/>
+            <a:r>
+              <a:rPr sz="1100" b="1" i="0">
+                <a:solidFill>
+                  <a:srgbClr val="006E96"/>
+                </a:solidFill>
+                <a:latin typeface="Arial"/>
+              </a:rPr>
+              <a:t>consumes</a:t>
+            </a:r>
+          </a:p>
+        </p:txBody>
+      </p:sp>
+      <p:sp>
+        <p:nvSpPr>
+          <p:cNvPr id="14" name="TextBox 13"/>
+          <p:cNvSpPr txBox="1"/>
+          <p:nvPr/>
+        </p:nvSpPr>
+        <p:spPr>
+          <a:xfrm>
+            <a:off x="5952744" y="2642615"/>
+            <a:ext cx="5586984" cy="548640"/>
+          </a:xfrm>
+          <a:prstGeom prst="rect">
+            <a:avLst/>
+          </a:prstGeom>
+          <a:noFill/>
+        </p:spPr>
+        <p:txBody>
+          <a:bodyPr wrap="square" anchor="ctr">
+            <a:spAutoFit/>
+          </a:bodyPr>
+          <a:lstStyle/>
+          <a:p>
+            <a:r>
+              <a:rPr sz="1200" b="0" i="1">
+                <a:solidFill>
+                  <a:srgbClr val="595959"/>
+                </a:solidFill>
+                <a:latin typeface="Arial"/>
+              </a:rPr>
+              <a:t>reuses the identity platform education stood up</a:t>
+            </a:r>
+          </a:p>
+        </p:txBody>
+      </p:sp>
+      <p:sp>
+        <p:nvSpPr>
+          <p:cNvPr id="15" name="TextBox 14"/>
+          <p:cNvSpPr txBox="1"/>
+          <p:nvPr/>
+        </p:nvSpPr>
+        <p:spPr>
+          <a:xfrm>
+            <a:off x="658368" y="3392423"/>
+            <a:ext cx="2514600" cy="548640"/>
+          </a:xfrm>
+          <a:prstGeom prst="rect">
+            <a:avLst/>
+          </a:prstGeom>
+          <a:noFill/>
+        </p:spPr>
+        <p:txBody>
+          <a:bodyPr wrap="square" anchor="ctr">
+            <a:spAutoFit/>
+          </a:bodyPr>
+          <a:lstStyle/>
+          <a:p>
+            <a:r>
+              <a:rPr sz="1400" b="1" i="0">
+                <a:solidFill>
+                  <a:srgbClr val="1A1A1A"/>
+                </a:solidFill>
+                <a:latin typeface="Arial"/>
+              </a:rPr>
+              <a:t>Sector 3 — agriculture</a:t>
+            </a:r>
+          </a:p>
+        </p:txBody>
+      </p:sp>
+      <p:sp>
+        <p:nvSpPr>
+          <p:cNvPr id="16" name="Rectangle 15"/>
+          <p:cNvSpPr/>
+          <p:nvPr/>
+        </p:nvSpPr>
+        <p:spPr>
+          <a:xfrm>
+            <a:off x="3310128" y="3447287"/>
+            <a:ext cx="1207007" cy="438912"/>
+          </a:xfrm>
+          <a:prstGeom prst="rect">
+            <a:avLst/>
+          </a:prstGeom>
+          <a:solidFill>
+            <a:srgbClr val="009CD6"/>
+          </a:solidFill>
+          <a:ln w="9525">
+            <a:solidFill>
+              <a:srgbClr val="FFFFFF"/>
+            </a:solidFill>
+          </a:ln>
+          <a:effectLst/>
+        </p:spPr>
+        <p:style>
+          <a:lnRef idx="1">
+            <a:schemeClr val="accent1"/>
+          </a:lnRef>
+          <a:fillRef idx="3">
+            <a:schemeClr val="accent1"/>
+          </a:fillRef>
+          <a:effectRef idx="2">
+            <a:schemeClr val="accent1"/>
+          </a:effectRef>
+          <a:fontRef idx="minor">
+            <a:schemeClr val="lt1"/>
+          </a:fontRef>
+        </p:style>
+        <p:txBody>
+          <a:bodyPr rtlCol="0" anchor="ctr" lIns="54864" rIns="54864" tIns="0" bIns="0" wrap="square"/>
+          <a:lstStyle/>
+          <a:p>
+            <a:pPr algn="ctr"/>
+            <a:r>
+              <a:rPr sz="1100" b="1" i="0">
+                <a:solidFill>
+                  <a:srgbClr val="FFFFFF"/>
+                </a:solidFill>
+                <a:latin typeface="Arial"/>
+              </a:rPr>
+              <a:t>its own</a:t>
+            </a:r>
+          </a:p>
+        </p:txBody>
+      </p:sp>
+      <p:sp>
+        <p:nvSpPr>
+          <p:cNvPr id="17" name="Rectangle 16"/>
+          <p:cNvSpPr/>
+          <p:nvPr/>
+        </p:nvSpPr>
+        <p:spPr>
+          <a:xfrm>
+            <a:off x="4544568" y="3447287"/>
+            <a:ext cx="877824" cy="438912"/>
+          </a:xfrm>
+          <a:prstGeom prst="rect">
+            <a:avLst/>
+          </a:prstGeom>
+          <a:solidFill>
+            <a:srgbClr val="E5F5FB"/>
+          </a:solidFill>
+          <a:ln w="9525">
+            <a:solidFill>
+              <a:srgbClr val="FFFFFF"/>
+            </a:solidFill>
+          </a:ln>
+          <a:effectLst/>
+        </p:spPr>
+        <p:style>
+          <a:lnRef idx="1">
+            <a:schemeClr val="accent1"/>
+          </a:lnRef>
+          <a:fillRef idx="3">
+            <a:schemeClr val="accent1"/>
+          </a:fillRef>
+          <a:effectRef idx="2">
+            <a:schemeClr val="accent1"/>
+          </a:effectRef>
+          <a:fontRef idx="minor">
+            <a:schemeClr val="lt1"/>
+          </a:fontRef>
+        </p:style>
+        <p:txBody>
+          <a:bodyPr rtlCol="0" anchor="ctr" lIns="54864" rIns="54864" tIns="0" bIns="0" wrap="square"/>
+          <a:lstStyle/>
+          <a:p>
+            <a:pPr algn="ctr"/>
+            <a:r>
+              <a:rPr sz="1100" b="1" i="0">
+                <a:solidFill>
+                  <a:srgbClr val="006E96"/>
+                </a:solidFill>
+                <a:latin typeface="Arial"/>
+              </a:rPr>
+              <a:t>consumes</a:t>
+            </a:r>
+          </a:p>
+        </p:txBody>
+      </p:sp>
+      <p:sp>
+        <p:nvSpPr>
+          <p:cNvPr id="18" name="TextBox 17"/>
+          <p:cNvSpPr txBox="1"/>
+          <p:nvPr/>
+        </p:nvSpPr>
+        <p:spPr>
+          <a:xfrm>
+            <a:off x="5541264" y="3392423"/>
+            <a:ext cx="5998464" cy="548640"/>
+          </a:xfrm>
+          <a:prstGeom prst="rect">
+            <a:avLst/>
+          </a:prstGeom>
+          <a:noFill/>
+        </p:spPr>
+        <p:txBody>
+          <a:bodyPr wrap="square" anchor="ctr">
+            <a:spAutoFit/>
+          </a:bodyPr>
+          <a:lstStyle/>
+          <a:p>
+            <a:r>
+              <a:rPr sz="1200" b="0" i="1">
+                <a:solidFill>
+                  <a:srgbClr val="595959"/>
+                </a:solidFill>
+                <a:latin typeface="Arial"/>
+              </a:rPr>
+              <a:t>reuses the data-exchange backbone</a:t>
+            </a:r>
+          </a:p>
+        </p:txBody>
+      </p:sp>
+      <p:sp>
+        <p:nvSpPr>
+          <p:cNvPr id="19" name="TextBox 18"/>
+          <p:cNvSpPr txBox="1"/>
+          <p:nvPr/>
+        </p:nvSpPr>
+        <p:spPr>
+          <a:xfrm>
+            <a:off x="658368" y="4142231"/>
+            <a:ext cx="2514600" cy="548640"/>
+          </a:xfrm>
+          <a:prstGeom prst="rect">
+            <a:avLst/>
+          </a:prstGeom>
+          <a:noFill/>
+        </p:spPr>
+        <p:txBody>
+          <a:bodyPr wrap="square" anchor="ctr">
+            <a:spAutoFit/>
+          </a:bodyPr>
+          <a:lstStyle/>
+          <a:p>
+            <a:r>
+              <a:rPr sz="1400" b="1" i="0">
+                <a:solidFill>
+                  <a:srgbClr val="1A1A1A"/>
+                </a:solidFill>
+                <a:latin typeface="Arial"/>
+              </a:rPr>
+              <a:t>Sector 4 — social protection</a:t>
+            </a:r>
+          </a:p>
+        </p:txBody>
+      </p:sp>
+      <p:sp>
+        <p:nvSpPr>
+          <p:cNvPr id="20" name="Rectangle 19"/>
+          <p:cNvSpPr/>
+          <p:nvPr/>
+        </p:nvSpPr>
+        <p:spPr>
+          <a:xfrm>
+            <a:off x="3310128" y="4197095"/>
+            <a:ext cx="960120" cy="438912"/>
+          </a:xfrm>
+          <a:prstGeom prst="rect">
+            <a:avLst/>
+          </a:prstGeom>
+          <a:solidFill>
+            <a:srgbClr val="009CD6"/>
+          </a:solidFill>
+          <a:ln w="9525">
+            <a:solidFill>
+              <a:srgbClr val="FFFFFF"/>
+            </a:solidFill>
+          </a:ln>
+          <a:effectLst/>
+        </p:spPr>
+        <p:style>
+          <a:lnRef idx="1">
+            <a:schemeClr val="accent1"/>
+          </a:lnRef>
+          <a:fillRef idx="3">
+            <a:schemeClr val="accent1"/>
+          </a:fillRef>
+          <a:effectRef idx="2">
+            <a:schemeClr val="accent1"/>
+          </a:effectRef>
+          <a:fontRef idx="minor">
+            <a:schemeClr val="lt1"/>
+          </a:fontRef>
+        </p:style>
+        <p:txBody>
+          <a:bodyPr rtlCol="0" anchor="ctr" lIns="54864" rIns="54864" tIns="0" bIns="0" wrap="square"/>
+          <a:lstStyle/>
+          <a:p>
+            <a:pPr algn="ctr"/>
+            <a:r>
+              <a:rPr sz="1100" b="1" i="0">
+                <a:solidFill>
+                  <a:srgbClr val="FFFFFF"/>
+                </a:solidFill>
+                <a:latin typeface="Arial"/>
+              </a:rPr>
+              <a:t>its own</a:t>
+            </a:r>
+          </a:p>
+        </p:txBody>
+      </p:sp>
+      <p:sp>
+        <p:nvSpPr>
+          <p:cNvPr id="21" name="Rectangle 20"/>
+          <p:cNvSpPr/>
+          <p:nvPr/>
+        </p:nvSpPr>
+        <p:spPr>
+          <a:xfrm>
+            <a:off x="4297680" y="4197095"/>
+            <a:ext cx="877824" cy="438912"/>
+          </a:xfrm>
+          <a:prstGeom prst="rect">
+            <a:avLst/>
+          </a:prstGeom>
+          <a:solidFill>
+            <a:srgbClr val="E5F5FB"/>
+          </a:solidFill>
+          <a:ln w="9525">
+            <a:solidFill>
+              <a:srgbClr val="FFFFFF"/>
+            </a:solidFill>
+          </a:ln>
+          <a:effectLst/>
+        </p:spPr>
+        <p:style>
+          <a:lnRef idx="1">
+            <a:schemeClr val="accent1"/>
+          </a:lnRef>
+          <a:fillRef idx="3">
+            <a:schemeClr val="accent1"/>
+          </a:fillRef>
+          <a:effectRef idx="2">
+            <a:schemeClr val="accent1"/>
+          </a:effectRef>
+          <a:fontRef idx="minor">
+            <a:schemeClr val="lt1"/>
+          </a:fontRef>
+        </p:style>
+        <p:txBody>
+          <a:bodyPr rtlCol="0" anchor="ctr" lIns="54864" rIns="54864" tIns="0" bIns="0" wrap="square"/>
+          <a:lstStyle/>
+          <a:p>
+            <a:pPr algn="ctr"/>
+            <a:r>
+              <a:rPr sz="1100" b="1" i="0">
+                <a:solidFill>
+                  <a:srgbClr val="006E96"/>
+                </a:solidFill>
+                <a:latin typeface="Arial"/>
+              </a:rPr>
+              <a:t>consumes</a:t>
+            </a:r>
+          </a:p>
+        </p:txBody>
+      </p:sp>
+      <p:sp>
+        <p:nvSpPr>
+          <p:cNvPr id="22" name="TextBox 21"/>
+          <p:cNvSpPr txBox="1"/>
+          <p:nvPr/>
+        </p:nvSpPr>
+        <p:spPr>
+          <a:xfrm>
+            <a:off x="5294376" y="4142231"/>
+            <a:ext cx="6245352" cy="548640"/>
+          </a:xfrm>
+          <a:prstGeom prst="rect">
+            <a:avLst/>
+          </a:prstGeom>
+          <a:noFill/>
+        </p:spPr>
+        <p:txBody>
+          <a:bodyPr wrap="square" anchor="ctr">
+            <a:spAutoFit/>
+          </a:bodyPr>
+          <a:lstStyle/>
+          <a:p>
+            <a:r>
+              <a:rPr sz="1200" b="0" i="1">
+                <a:solidFill>
+                  <a:srgbClr val="595959"/>
+                </a:solidFill>
+                <a:latin typeface="Arial"/>
+              </a:rPr>
+              <a:t>the platforms are more complete each time</a:t>
+            </a:r>
+          </a:p>
+        </p:txBody>
+      </p:sp>
+      <p:sp>
+        <p:nvSpPr>
+          <p:cNvPr id="23" name="TextBox 22"/>
+          <p:cNvSpPr txBox="1"/>
+          <p:nvPr/>
+        </p:nvSpPr>
+        <p:spPr>
+          <a:xfrm>
+            <a:off x="658368" y="5760720"/>
+            <a:ext cx="10881360" cy="548640"/>
+          </a:xfrm>
+          <a:prstGeom prst="rect">
+            <a:avLst/>
+          </a:prstGeom>
+          <a:noFill/>
+        </p:spPr>
+        <p:txBody>
           <a:bodyPr wrap="square">
             <a:spAutoFit/>
           </a:bodyPr>
           <a:lstStyle/>
           <a:p>
-            <a:pPr>
-              <a:spcAft>
-                <a:spcPts val="700"/>
-              </a:spcAft>
-            </a:pPr>
-            <a:r>
-              <a:rPr sz="2300" b="1" i="0">
+            <a:r>
+              <a:rPr sz="1550" b="1" i="0">
                 <a:solidFill>
                   <a:srgbClr val="006E96"/>
                 </a:solidFill>
@@ -13538,7 +14309,7 @@
       </p:sp>
       <p:sp>
         <p:nvSpPr>
-          <p:cNvPr id="7" name="TextBox 6"/>
+          <p:cNvPr id="24" name="TextBox 23"/>
           <p:cNvSpPr txBox="1"/>
           <p:nvPr/>
         </p:nvSpPr>
